--- a/brand/spark-packaging-qbr.pptx
+++ b/brand/spark-packaging-qbr.pptx
@@ -113,20 +113,20 @@
   <p:extLst>
     <p:ext uri="{521415D9-36F7-43E2-AB2F-B90AF26B5E84}">
       <p14:sectionLst xmlns:p14="http://schemas.microsoft.com/office/powerpoint/2010/main">
-        <p14:section name="Cover" id="{a67eb62f-0421-e7c9-8ff7-74c36f68a3e5}">
+        <p14:section name="Cover" id="{78ec0bda-6242-36b8-83d4-5e29ec80367a}">
           <p14:sldIdLst>
             <p14:sldId id="256"/>
             <p14:sldId id="257"/>
           </p14:sldIdLst>
         </p14:section>
-        <p14:section name="Detail" id="{38d1b5f4-af0d-74a7-c16c-a83f56234d53}">
+        <p14:section name="Detail" id="{78d663cb-9a8a-9f66-e96d-dbd0eb864a08}">
           <p14:sldIdLst>
             <p14:sldId id="258"/>
             <p14:sldId id="259"/>
             <p14:sldId id="260"/>
           </p14:sldIdLst>
         </p14:section>
-        <p14:section name="Ahead" id="{54851a6f-9c6d-d38a-4fd7-73f979124f68}">
+        <p14:section name="Ahead" id="{3542f981-ae03-2a23-8782-4e3e0b6d7851}">
           <p14:sldIdLst>
             <p14:sldId id="261"/>
             <p14:sldId id="262"/>
@@ -169,7 +169,7 @@
           </c:tx>
           <c:spPr>
             <a:solidFill>
-              <a:srgbClr val="FFDD5F"/>
+              <a:srgbClr val="FFDE59"/>
             </a:solidFill>
             <a:effectLst/>
           </c:spPr>
@@ -1394,7 +1394,7 @@
     <p:bg>
       <p:bgPr>
         <a:solidFill>
-          <a:srgbClr val="3D3D3D"/>
+          <a:srgbClr val="3E3E3E"/>
         </a:solidFill>
       </p:bgPr>
     </p:bg>
@@ -1429,7 +1429,7 @@
         <p:spPr>
           <a:xfrm>
             <a:off x="658368" y="548640"/>
-            <a:ext cx="2299716" cy="726948"/>
+            <a:ext cx="2204618" cy="726948"/>
           </a:xfrm>
           <a:prstGeom prst="rect">
             <a:avLst/>
@@ -1568,7 +1568,7 @@
             <a:avLst/>
           </a:prstGeom>
           <a:solidFill>
-            <a:srgbClr val="FFDD5F"/>
+            <a:srgbClr val="FFDE59"/>
           </a:solidFill>
           <a:ln/>
         </p:spPr>
@@ -1587,7 +1587,7 @@
     <p:bg>
       <p:bgPr>
         <a:solidFill>
-          <a:srgbClr val="3D3D3D"/>
+          <a:srgbClr val="3E3E3E"/>
         </a:solidFill>
       </p:bgPr>
     </p:bg>
@@ -1631,7 +1631,7 @@
               <a:buNone/>
               <a:defRPr lang="en-US" sz="1300" b="1" spc="400" kern="0" dirty="0">
                 <a:solidFill>
-                  <a:srgbClr val="FFDD5F"/>
+                  <a:srgbClr val="FFDE59"/>
                 </a:solidFill>
               </a:defRPr>
             </a:lvl1pPr>
@@ -1700,7 +1700,7 @@
         <p:spPr>
           <a:xfrm>
             <a:off x="10332720" y="5852160"/>
-            <a:ext cx="1298448" cy="410566"/>
+            <a:ext cx="1245413" cy="410566"/>
           </a:xfrm>
           <a:prstGeom prst="rect">
             <a:avLst/>
@@ -1722,7 +1722,7 @@
             <a:avLst/>
           </a:prstGeom>
           <a:solidFill>
-            <a:srgbClr val="FFDD5F"/>
+            <a:srgbClr val="FFDE59"/>
           </a:solidFill>
           <a:ln/>
         </p:spPr>
@@ -1854,7 +1854,7 @@
         <p:spPr>
           <a:xfrm>
             <a:off x="10716768" y="6053328"/>
-            <a:ext cx="948233" cy="299923"/>
+            <a:ext cx="909828" cy="299923"/>
           </a:xfrm>
           <a:prstGeom prst="rect">
             <a:avLst/>
@@ -1988,7 +1988,7 @@
         <p:spPr>
           <a:xfrm>
             <a:off x="10716768" y="6053328"/>
-            <a:ext cx="948233" cy="299923"/>
+            <a:ext cx="909828" cy="299923"/>
           </a:xfrm>
           <a:prstGeom prst="rect">
             <a:avLst/>
@@ -2048,7 +2048,7 @@
     <p:bg>
       <p:bgPr>
         <a:solidFill>
-          <a:srgbClr val="3D3D3D"/>
+          <a:srgbClr val="3E3E3E"/>
         </a:solidFill>
       </p:bgPr>
     </p:bg>
@@ -2092,7 +2092,7 @@
               <a:buNone/>
               <a:defRPr lang="en-US" sz="6000" dirty="0">
                 <a:solidFill>
-                  <a:srgbClr val="FFDD5F"/>
+                  <a:srgbClr val="FFDE59"/>
                 </a:solidFill>
               </a:defRPr>
             </a:lvl1pPr>
@@ -2161,7 +2161,7 @@
         <p:spPr>
           <a:xfrm>
             <a:off x="10332720" y="5760720"/>
-            <a:ext cx="1298448" cy="410566"/>
+            <a:ext cx="1245413" cy="410566"/>
           </a:xfrm>
           <a:prstGeom prst="rect">
             <a:avLst/>
@@ -2183,7 +2183,7 @@
             <a:avLst/>
           </a:prstGeom>
           <a:solidFill>
-            <a:srgbClr val="FFDD5F"/>
+            <a:srgbClr val="FFDE59"/>
           </a:solidFill>
           <a:ln/>
         </p:spPr>
@@ -2699,7 +2699,7 @@
             <a:r>
               <a:rPr lang="en-US" sz="7600" dirty="0">
                 <a:solidFill>
-                  <a:srgbClr val="FFDD5F"/>
+                  <a:srgbClr val="FFDE59"/>
                 </a:solidFill>
                 <a:latin typeface="Bebas Neue" pitchFamily="34" charset="0"/>
                 <a:ea typeface="Bebas Neue" pitchFamily="34" charset="-122"/>
@@ -2774,7 +2774,7 @@
             <a:r>
               <a:rPr lang="en-US" sz="7600" dirty="0">
                 <a:solidFill>
-                  <a:srgbClr val="FFDD5F"/>
+                  <a:srgbClr val="FFDE59"/>
                 </a:solidFill>
                 <a:latin typeface="Bebas Neue" pitchFamily="34" charset="0"/>
                 <a:ea typeface="Bebas Neue" pitchFamily="34" charset="-122"/>
@@ -2849,7 +2849,7 @@
             <a:r>
               <a:rPr lang="en-US" sz="7600" dirty="0">
                 <a:solidFill>
-                  <a:srgbClr val="FFDD5F"/>
+                  <a:srgbClr val="FFDE59"/>
                 </a:solidFill>
                 <a:latin typeface="Bebas Neue" pitchFamily="34" charset="0"/>
                 <a:ea typeface="Bebas Neue" pitchFamily="34" charset="-122"/>
@@ -2924,7 +2924,7 @@
             <a:r>
               <a:rPr lang="en-US" sz="7600" dirty="0">
                 <a:solidFill>
-                  <a:srgbClr val="FFDD5F"/>
+                  <a:srgbClr val="FFDE59"/>
                 </a:solidFill>
                 <a:latin typeface="Bebas Neue" pitchFamily="34" charset="0"/>
                 <a:ea typeface="Bebas Neue" pitchFamily="34" charset="-122"/>
@@ -3119,7 +3119,7 @@
             <a:r>
               <a:rPr lang="en-US" sz="1300" b="1" spc="400" kern="0" dirty="0">
                 <a:solidFill>
-                  <a:srgbClr val="FFDD5F"/>
+                  <a:srgbClr val="FFDE59"/>
                 </a:solidFill>
               </a:rPr>
               <a:t>THE QUARTER</a:t>
@@ -3308,7 +3308,7 @@
             <a:avLst/>
           </a:prstGeom>
           <a:solidFill>
-            <a:srgbClr val="FFDD5F"/>
+            <a:srgbClr val="FFDE59"/>
           </a:solidFill>
           <a:ln/>
         </p:spPr>
@@ -3476,7 +3476,7 @@
             <a:avLst/>
           </a:prstGeom>
           <a:solidFill>
-            <a:srgbClr val="FFDD5F"/>
+            <a:srgbClr val="FFDE59"/>
           </a:solidFill>
           <a:ln/>
         </p:spPr>
@@ -3644,7 +3644,7 @@
             <a:avLst/>
           </a:prstGeom>
           <a:solidFill>
-            <a:srgbClr val="FFDD5F"/>
+            <a:srgbClr val="FFDE59"/>
           </a:solidFill>
           <a:ln/>
         </p:spPr>
@@ -4093,7 +4093,7 @@
                       <a:tailEnd type="none" w="med" len="med"/>
                     </a:lnB>
                     <a:solidFill>
-                      <a:srgbClr val="3D3D3D"/>
+                      <a:srgbClr val="3E3E3E"/>
                     </a:solidFill>
                   </a:tcPr>
                 </a:tc>
@@ -4161,7 +4161,7 @@
                       <a:tailEnd type="none" w="med" len="med"/>
                     </a:lnB>
                     <a:solidFill>
-                      <a:srgbClr val="3D3D3D"/>
+                      <a:srgbClr val="3E3E3E"/>
                     </a:solidFill>
                   </a:tcPr>
                 </a:tc>
@@ -4229,7 +4229,7 @@
                       <a:tailEnd type="none" w="med" len="med"/>
                     </a:lnB>
                     <a:solidFill>
-                      <a:srgbClr val="3D3D3D"/>
+                      <a:srgbClr val="3E3E3E"/>
                     </a:solidFill>
                   </a:tcPr>
                 </a:tc>
@@ -4913,7 +4913,7 @@
             <a:r>
               <a:rPr lang="en-US" sz="6000" dirty="0">
                 <a:solidFill>
-                  <a:srgbClr val="FFDD5F"/>
+                  <a:srgbClr val="FFDE59"/>
                 </a:solidFill>
               </a:rPr>
               <a:t>SAME TIME NEXT QUARTER</a:t>
@@ -4973,7 +4973,7 @@
   <a:themeElements>
     <a:clrScheme name="Spark Packaging">
       <a:dk1>
-        <a:srgbClr val="3D3D3D"/>
+        <a:srgbClr val="3E3E3E"/>
       </a:dk1>
       <a:lt1>
         <a:srgbClr val="FFFFFF"/>
@@ -4985,7 +4985,7 @@
         <a:srgbClr val="FAF9F6"/>
       </a:lt2>
       <a:accent1>
-        <a:srgbClr val="FFDD5F"/>
+        <a:srgbClr val="FFDE59"/>
       </a:accent1>
       <a:accent2>
         <a:srgbClr val="FFE98F"/>
